--- a/my-task/report-template-ai-agent/예시_채워진샘플.pptx
+++ b/my-task/report-template-ai-agent/예시_채워진샘플.pptx
@@ -9,6 +9,7 @@
     <p:sldId id="257" r:id="rId9"/>
     <p:sldId id="258" r:id="rId10"/>
     <p:sldId id="259" r:id="rId11"/>
+    <p:sldId id="260" r:id="rId12"/>
   </p:sldIdLst>
   <p:sldSz cx="12191695" cy="6858000" type="screen4x3"/>
   <p:notesSz cx="6858000" cy="9144000"/>
@@ -715,7 +716,77 @@
           <a:lstStyle/>
           <a:p>
             <a:r>
-              <a:t>발표 스크립트: 가장 큰 리스크는 로그 진단의 데이터 편중입니다. 하반기에는 검사 리뷰 자동화를 전 라인으로 넓히는 것을 반드시 넘기겠습니다.</a:t>
+              <a:t>발표 스크립트: 가장 큰 리스크는 로그 진단의 데이터 편중인데, 이건 우리가 데이터 보강으로 잡을 수 있습니다. 하반기에는 검사 리뷰 자동화를 전 라인으로 넓히는 것을 반드시 넘기겠습니다.</a:t>
+            </a:r>
+          </a:p>
+        </p:txBody>
+      </p:sp>
+      <p:sp>
+        <p:nvSpPr>
+          <p:cNvPr id="4" name="Slide Number Placeholder 3"/>
+          <p:cNvSpPr>
+            <a:spLocks noGrp="1"/>
+          </p:cNvSpPr>
+          <p:nvPr>
+            <p:ph type="sldNum" idx="5" sz="quarter"/>
+          </p:nvPr>
+        </p:nvSpPr>
+        <p:spPr/>
+      </p:sp>
+    </p:spTree>
+  </p:cSld>
+  <p:clrMapOvr>
+    <a:masterClrMapping/>
+  </p:clrMapOvr>
+</p:notes>
+</file>
+
+<file path=ppt/notesSlides/notesSlide5.xml><?xml version="1.0" encoding="utf-8"?>
+<p:notes xmlns:a="http://schemas.openxmlformats.org/drawingml/2006/main" xmlns:p="http://schemas.openxmlformats.org/presentationml/2006/main" xmlns:r="http://schemas.openxmlformats.org/officeDocument/2006/relationships">
+  <p:cSld>
+    <p:spTree>
+      <p:nvGrpSpPr>
+        <p:cNvPr id="1" name=""/>
+        <p:cNvGrpSpPr/>
+        <p:nvPr/>
+      </p:nvGrpSpPr>
+      <p:grpSpPr>
+        <a:xfrm>
+          <a:off x="0" y="0"/>
+          <a:ext cx="0" cy="0"/>
+          <a:chOff x="0" y="0"/>
+          <a:chExt cx="0" cy="0"/>
+        </a:xfrm>
+      </p:grpSpPr>
+      <p:sp>
+        <p:nvSpPr>
+          <p:cNvPr id="2" name="Slide Image Placeholder 1"/>
+          <p:cNvSpPr>
+            <a:spLocks noGrp="1"/>
+          </p:cNvSpPr>
+          <p:nvPr>
+            <p:ph type="sldImg" idx="2"/>
+          </p:nvPr>
+        </p:nvSpPr>
+        <p:spPr/>
+      </p:sp>
+      <p:sp>
+        <p:nvSpPr>
+          <p:cNvPr id="3" name="Notes Placeholder 2"/>
+          <p:cNvSpPr>
+            <a:spLocks noGrp="1"/>
+          </p:cNvSpPr>
+          <p:nvPr>
+            <p:ph type="body" idx="3" sz="quarter"/>
+          </p:nvPr>
+        </p:nvSpPr>
+        <p:spPr/>
+        <p:txBody>
+          <a:bodyPr/>
+          <a:lstStyle/>
+          <a:p>
+            <a:r>
+              <a:t>발표 스크립트: 리포트 생성 에이전트는 인력 배치 문제로 파일럿을 하반기로 넘겨, 상반기 로드맵 일정을 이 한 건 조정 요청드립니다.</a:t>
             </a:r>
           </a:p>
         </p:txBody>
@@ -4239,7 +4310,7 @@
         </p:nvGraphicFramePr>
         <p:xfrm>
           <a:off x="502920" y="1234440"/>
-          <a:ext cx="11185853" cy="1338261"/>
+          <a:ext cx="11185853" cy="1544954"/>
         </p:xfrm>
         <a:graphic>
           <a:graphicData uri="http://schemas.openxmlformats.org/drawingml/2006/table">
@@ -4582,7 +4653,7 @@
                   </a:tcPr>
                 </a:tc>
               </a:tr>
-              <a:tr h="282892">
+              <a:tr h="489585">
                 <a:tc>
                   <a:txBody>
                     <a:bodyPr wrap="square"/>
@@ -4642,7 +4713,7 @@
                           </a:solidFill>
                           <a:latin typeface="맑은 고딕"/>
                         </a:rPr>
-                        <a:t>정확도 68%</a:t>
+                        <a:t>정확도 68% (파일럿 라벨 500건 기준)</a:t>
                       </a:r>
                     </a:p>
                   </a:txBody>
@@ -4920,7 +4991,48 @@
         </p:nvSpPr>
         <p:spPr>
           <a:xfrm>
-            <a:off x="548640" y="2682429"/>
+            <a:off x="548640" y="2889122"/>
+            <a:ext cx="11185855" cy="332359"/>
+          </a:xfrm>
+          <a:prstGeom prst="rect">
+            <a:avLst/>
+          </a:prstGeom>
+          <a:solidFill>
+            <a:srgbClr val="F7F9FB"/>
+          </a:solidFill>
+          <a:ln w="12700">
+            <a:solidFill>
+              <a:srgbClr val="DCE6F1"/>
+            </a:solidFill>
+          </a:ln>
+        </p:spPr>
+        <p:txBody>
+          <a:bodyPr wrap="square" lIns="109728">
+            <a:spAutoFit/>
+          </a:bodyPr>
+          <a:lstStyle/>
+          <a:p>
+            <a:r>
+              <a:rPr sz="1150" b="0">
+                <a:solidFill>
+                  <a:srgbClr val="334455"/>
+                </a:solidFill>
+                <a:latin typeface="맑은 고딕"/>
+              </a:rPr>
+              <a:t>이행도 모수: 검사 리뷰 = "PoC 완료" 자체를 100, 로그 진단 = 목표 정확도 80% 대비, 리포트 = 파일럿 착수 단계 대비.</a:t>
+            </a:r>
+          </a:p>
+        </p:txBody>
+      </p:sp>
+      <p:sp>
+        <p:nvSpPr>
+          <p:cNvPr id="7" name="TextBox 6"/>
+          <p:cNvSpPr txBox="1"/>
+          <p:nvPr/>
+        </p:nvSpPr>
+        <p:spPr>
+          <a:xfrm>
+            <a:off x="548640" y="3276345"/>
             <a:ext cx="11185855" cy="344423"/>
           </a:xfrm>
           <a:prstGeom prst="rect">
@@ -4941,7 +5053,7 @@
                 </a:solidFill>
                 <a:latin typeface="맑은 고딕"/>
               </a:rPr>
-              <a:t>총평:</a:t>
+              <a:t>총평 (부서 롤업):</a:t>
             </a:r>
             <a:r>
               <a:rPr sz="1200" b="0">
@@ -4950,7 +5062,7 @@
                 </a:solidFill>
                 <a:latin typeface="맑은 고딕"/>
               </a:rPr>
-              <a:t> 3개 과제 중 1개 정상 이행, 1개 데이터 이슈로 부분 이행, 1개는 인력 배치 문제로 지연.</a:t>
+              <a:t> 3개 과제 · 🟢 1 / 🟡 1 / 🔴 1 — 1개 정상 이행, 로그 진단은 데이터 편중으로 부분 이행, 리포트는 인력 배치로 지연.</a:t>
             </a:r>
           </a:p>
         </p:txBody>
@@ -5270,7 +5382,7 @@
                 </a:solidFill>
                 <a:latin typeface="맑은 고딕"/>
               </a:rPr>
-              <a:t>증거:</a:t>
+              <a:t>증거 (효과):</a:t>
             </a:r>
             <a:r>
               <a:rPr sz="1200" b="0">
@@ -5279,7 +5391,7 @@
                 </a:solidFill>
                 <a:latin typeface="맑은 고딕"/>
               </a:rPr>
-              <a:t> 1차 판정 대상 물량 주 320건 → 리뷰어 직접 확인 45건 (약 86%↓). 파일럿 라인 기준.</a:t>
+              <a:t> 리뷰어 직접 확인 물량 주 320건 → 45건 (약 86%↓). 파일럿 라인 기준, 리뷰 대기시간도 눈에 띄게 단축.</a:t>
             </a:r>
           </a:p>
         </p:txBody>
@@ -5293,6 +5405,58 @@
         <p:spPr>
           <a:xfrm>
             <a:off x="548640" y="2831588"/>
+            <a:ext cx="11185855" cy="344423"/>
+          </a:xfrm>
+          <a:prstGeom prst="rect">
+            <a:avLst/>
+          </a:prstGeom>
+          <a:noFill/>
+        </p:spPr>
+        <p:txBody>
+          <a:bodyPr wrap="square">
+            <a:spAutoFit/>
+          </a:bodyPr>
+          <a:lstStyle/>
+          <a:p>
+            <a:r>
+              <a:rPr sz="1200">
+                <a:solidFill>
+                  <a:srgbClr val="262626"/>
+                </a:solidFill>
+                <a:latin typeface="맑은 고딕"/>
+              </a:rPr>
+              <a:t>• </a:t>
+            </a:r>
+            <a:r>
+              <a:rPr sz="1200" b="1">
+                <a:solidFill>
+                  <a:srgbClr val="262626"/>
+                </a:solidFill>
+                <a:latin typeface="맑은 고딕"/>
+              </a:rPr>
+              <a:t>사용범위 (수용도):</a:t>
+            </a:r>
+            <a:r>
+              <a:rPr sz="1200" b="0">
+                <a:solidFill>
+                  <a:srgbClr val="262626"/>
+                </a:solidFill>
+                <a:latin typeface="맑은 고딕"/>
+              </a:rPr>
+              <a:t> 파일럿 1개 라인·리뷰어 3명이 상시 사용 중. "의심 케이스만 보면 돼 판정이 편해졌다"는 현업 피드백.</a:t>
+            </a:r>
+          </a:p>
+        </p:txBody>
+      </p:sp>
+      <p:sp>
+        <p:nvSpPr>
+          <p:cNvPr id="10" name="TextBox 9"/>
+          <p:cNvSpPr txBox="1"/>
+          <p:nvPr/>
+        </p:nvSpPr>
+        <p:spPr>
+          <a:xfrm>
+            <a:off x="548640" y="3230875"/>
             <a:ext cx="11185855" cy="344423"/>
           </a:xfrm>
           <a:prstGeom prst="rect">
@@ -5538,7 +5702,7 @@
                 </a:solidFill>
                 <a:latin typeface="맑은 고딕"/>
               </a:rPr>
-              <a:t>로그 진단 에이전트: 학습 데이터가 흔한 이상 패턴에 편중 → 희소 이상 놓칠 위험.</a:t>
+              <a:t>[통제가능] 로그 진단 에이전트: 학습 데이터가 흔한 이상 패턴에 편중 → 데이터 보강으로 해소 가능.</a:t>
             </a:r>
           </a:p>
         </p:txBody>
@@ -5581,7 +5745,7 @@
                 </a:solidFill>
                 <a:latin typeface="맑은 고딕"/>
               </a:rPr>
-              <a:t>리포트 생성 에이전트: 전담 인력 부재가 지속되면 하반기도 지연 가능.</a:t>
+              <a:t>[외부의존] 리포트 생성 에이전트: 전담 인력이 타 과제에 묶여 있어, 인력 재배치 없이는 하반기도 지연 가능.</a:t>
             </a:r>
           </a:p>
         </p:txBody>
@@ -5617,6 +5781,15 @@
               </a:rPr>
               <a:t>하반기 중점 방향</a:t>
             </a:r>
+            <a:r>
+              <a:rPr sz="1200" b="0">
+                <a:solidFill>
+                  <a:srgbClr val="262626"/>
+                </a:solidFill>
+                <a:latin typeface="맑은 고딕"/>
+              </a:rPr>
+              <a:t> (대표 1개 마일스톤까지)</a:t>
+            </a:r>
           </a:p>
         </p:txBody>
       </p:sp>
@@ -5658,7 +5831,7 @@
                 </a:solidFill>
                 <a:latin typeface="맑은 고딕"/>
               </a:rPr>
-              <a:t>검사 리뷰 자동화: 파일럿 → 전 라인 상용 이관.</a:t>
+              <a:t>검사 리뷰 자동화: Q3 3개 라인 확대 → Q4 전 라인 상용 이관 / 완료 기준: 전 라인에서 리뷰어 직접 확인 물량 80%↓ 유지.</a:t>
             </a:r>
           </a:p>
         </p:txBody>
@@ -5706,6 +5879,305 @@
           </a:p>
         </p:txBody>
       </p:sp>
+    </p:spTree>
+  </p:cSld>
+  <p:clrMapOvr>
+    <a:masterClrMapping/>
+  </p:clrMapOvr>
+</p:sld>
+</file>
+
+<file path=ppt/slides/slide5.xml><?xml version="1.0" encoding="utf-8"?>
+<p:sld xmlns:a="http://schemas.openxmlformats.org/drawingml/2006/main" xmlns:p="http://schemas.openxmlformats.org/presentationml/2006/main" xmlns:r="http://schemas.openxmlformats.org/officeDocument/2006/relationships">
+  <p:cSld>
+    <p:spTree>
+      <p:nvGrpSpPr>
+        <p:cNvPr id="1" name=""/>
+        <p:cNvGrpSpPr/>
+        <p:nvPr/>
+      </p:nvGrpSpPr>
+      <p:grpSpPr/>
+      <p:sp>
+        <p:nvSpPr>
+          <p:cNvPr id="2" name="Rectangle 1"/>
+          <p:cNvSpPr/>
+          <p:nvPr/>
+        </p:nvSpPr>
+        <p:spPr>
+          <a:xfrm>
+            <a:off x="0" y="0"/>
+            <a:ext cx="12191695" cy="109728"/>
+          </a:xfrm>
+          <a:prstGeom prst="rect">
+            <a:avLst/>
+          </a:prstGeom>
+          <a:solidFill>
+            <a:srgbClr val="1F497D"/>
+          </a:solidFill>
+          <a:ln>
+            <a:noFill/>
+          </a:ln>
+        </p:spPr>
+        <p:style>
+          <a:lnRef idx="1">
+            <a:schemeClr val="accent1"/>
+          </a:lnRef>
+          <a:fillRef idx="3">
+            <a:schemeClr val="accent1"/>
+          </a:fillRef>
+          <a:effectRef idx="2">
+            <a:schemeClr val="accent1"/>
+          </a:effectRef>
+          <a:fontRef idx="minor">
+            <a:schemeClr val="lt1"/>
+          </a:fontRef>
+        </p:style>
+        <p:txBody>
+          <a:bodyPr rtlCol="0" anchor="ctr"/>
+          <a:lstStyle/>
+          <a:p>
+            <a:pPr algn="ctr"/>
+          </a:p>
+        </p:txBody>
+      </p:sp>
+      <p:sp>
+        <p:nvSpPr>
+          <p:cNvPr id="3" name="TextBox 2"/>
+          <p:cNvSpPr txBox="1"/>
+          <p:nvPr/>
+        </p:nvSpPr>
+        <p:spPr>
+          <a:xfrm>
+            <a:off x="502920" y="292608"/>
+            <a:ext cx="10271455" cy="868680"/>
+          </a:xfrm>
+          <a:prstGeom prst="rect">
+            <a:avLst/>
+          </a:prstGeom>
+          <a:noFill/>
+        </p:spPr>
+        <p:txBody>
+          <a:bodyPr wrap="square">
+            <a:spAutoFit/>
+          </a:bodyPr>
+          <a:lstStyle/>
+          <a:p>
+            <a:r>
+              <a:rPr sz="2400" b="1">
+                <a:solidFill>
+                  <a:srgbClr val="1F497D"/>
+                </a:solidFill>
+                <a:latin typeface="맑은 고딕"/>
+              </a:rPr>
+              <a:t>부록: 로드맵 수정 사항</a:t>
+            </a:r>
+          </a:p>
+        </p:txBody>
+      </p:sp>
+      <p:sp>
+        <p:nvSpPr>
+          <p:cNvPr id="4" name="TextBox 3"/>
+          <p:cNvSpPr txBox="1"/>
+          <p:nvPr/>
+        </p:nvSpPr>
+        <p:spPr>
+          <a:xfrm>
+            <a:off x="11185855" y="320040"/>
+            <a:ext cx="731520" cy="457200"/>
+          </a:xfrm>
+          <a:prstGeom prst="rect">
+            <a:avLst/>
+          </a:prstGeom>
+          <a:noFill/>
+        </p:spPr>
+        <p:txBody>
+          <a:bodyPr wrap="none">
+            <a:spAutoFit/>
+          </a:bodyPr>
+          <a:lstStyle/>
+          <a:p>
+            <a:pPr algn="r"/>
+            <a:r>
+              <a:rPr sz="1400">
+                <a:solidFill>
+                  <a:srgbClr val="595959"/>
+                </a:solidFill>
+                <a:latin typeface="맑은 고딕"/>
+              </a:rPr>
+              <a:t>5</a:t>
+            </a:r>
+          </a:p>
+        </p:txBody>
+      </p:sp>
+      <p:graphicFrame>
+        <p:nvGraphicFramePr>
+          <p:cNvPr id="5" name="Table 4"/>
+          <p:cNvGraphicFramePr>
+            <a:graphicFrameLocks noGrp="1"/>
+          </p:cNvGraphicFramePr>
+          <p:nvPr/>
+        </p:nvGraphicFramePr>
+        <p:xfrm>
+          <a:off x="502920" y="1234440"/>
+          <a:ext cx="11185854" cy="565784"/>
+        </p:xfrm>
+        <a:graphic>
+          <a:graphicData uri="http://schemas.openxmlformats.org/drawingml/2006/table">
+            <a:tbl>
+              <a:tblPr firstRow="1" bandRow="1">
+                <a:tableStyleId>{5C22544A-7EE6-4342-B048-85BDC9FD1C3A}</a:tableStyleId>
+              </a:tblPr>
+              <a:tblGrid>
+                <a:gridCol w="3728618"/>
+                <a:gridCol w="3728618"/>
+                <a:gridCol w="3728618"/>
+              </a:tblGrid>
+              <a:tr h="282892">
+                <a:tc>
+                  <a:txBody>
+                    <a:bodyPr wrap="square"/>
+                    <a:lstStyle/>
+                    <a:p>
+                      <a:pPr algn="l"/>
+                      <a:r>
+                        <a:rPr sz="1100" b="1">
+                          <a:solidFill>
+                            <a:srgbClr val="1F497D"/>
+                          </a:solidFill>
+                          <a:latin typeface="맑은 고딕"/>
+                        </a:rPr>
+                        <a:t>변경 항목</a:t>
+                      </a:r>
+                    </a:p>
+                  </a:txBody>
+                  <a:tcPr marL="54864" marR="54864" marT="18288" marB="18288" anchor="ctr">
+                    <a:solidFill>
+                      <a:srgbClr val="DCE6F1"/>
+                    </a:solidFill>
+                  </a:tcPr>
+                </a:tc>
+                <a:tc>
+                  <a:txBody>
+                    <a:bodyPr wrap="square"/>
+                    <a:lstStyle/>
+                    <a:p>
+                      <a:pPr algn="l"/>
+                      <a:r>
+                        <a:rPr sz="1100" b="1">
+                          <a:solidFill>
+                            <a:srgbClr val="1F497D"/>
+                          </a:solidFill>
+                          <a:latin typeface="맑은 고딕"/>
+                        </a:rPr>
+                        <a:t>변경 전 → 후</a:t>
+                      </a:r>
+                    </a:p>
+                  </a:txBody>
+                  <a:tcPr marL="54864" marR="54864" marT="18288" marB="18288" anchor="ctr">
+                    <a:solidFill>
+                      <a:srgbClr val="DCE6F1"/>
+                    </a:solidFill>
+                  </a:tcPr>
+                </a:tc>
+                <a:tc>
+                  <a:txBody>
+                    <a:bodyPr wrap="square"/>
+                    <a:lstStyle/>
+                    <a:p>
+                      <a:pPr algn="l"/>
+                      <a:r>
+                        <a:rPr sz="1100" b="1">
+                          <a:solidFill>
+                            <a:srgbClr val="1F497D"/>
+                          </a:solidFill>
+                          <a:latin typeface="맑은 고딕"/>
+                        </a:rPr>
+                        <a:t>사유</a:t>
+                      </a:r>
+                    </a:p>
+                  </a:txBody>
+                  <a:tcPr marL="54864" marR="54864" marT="18288" marB="18288" anchor="ctr">
+                    <a:solidFill>
+                      <a:srgbClr val="DCE6F1"/>
+                    </a:solidFill>
+                  </a:tcPr>
+                </a:tc>
+              </a:tr>
+              <a:tr h="282892">
+                <a:tc>
+                  <a:txBody>
+                    <a:bodyPr wrap="square"/>
+                    <a:lstStyle/>
+                    <a:p>
+                      <a:pPr algn="l"/>
+                      <a:r>
+                        <a:rPr sz="1050" b="0">
+                          <a:solidFill>
+                            <a:srgbClr val="262626"/>
+                          </a:solidFill>
+                          <a:latin typeface="맑은 고딕"/>
+                        </a:rPr>
+                        <a:t>리포트 초안 생성 에이전트 일정</a:t>
+                      </a:r>
+                    </a:p>
+                  </a:txBody>
+                  <a:tcPr marL="54864" marR="54864" marT="18288" marB="18288" anchor="ctr">
+                    <a:solidFill>
+                      <a:srgbClr val="FFFFFF"/>
+                    </a:solidFill>
+                  </a:tcPr>
+                </a:tc>
+                <a:tc>
+                  <a:txBody>
+                    <a:bodyPr wrap="square"/>
+                    <a:lstStyle/>
+                    <a:p>
+                      <a:pPr algn="l"/>
+                      <a:r>
+                        <a:rPr sz="1050" b="0">
+                          <a:solidFill>
+                            <a:srgbClr val="262626"/>
+                          </a:solidFill>
+                          <a:latin typeface="맑은 고딕"/>
+                        </a:rPr>
+                        <a:t>H1 파일럿 → H2(Q3) 파일럿</a:t>
+                      </a:r>
+                    </a:p>
+                  </a:txBody>
+                  <a:tcPr marL="54864" marR="54864" marT="18288" marB="18288" anchor="ctr">
+                    <a:solidFill>
+                      <a:srgbClr val="FFFFFF"/>
+                    </a:solidFill>
+                  </a:tcPr>
+                </a:tc>
+                <a:tc>
+                  <a:txBody>
+                    <a:bodyPr wrap="square"/>
+                    <a:lstStyle/>
+                    <a:p>
+                      <a:pPr algn="l"/>
+                      <a:r>
+                        <a:rPr sz="1050" b="0">
+                          <a:solidFill>
+                            <a:srgbClr val="262626"/>
+                          </a:solidFill>
+                          <a:latin typeface="맑은 고딕"/>
+                        </a:rPr>
+                        <a:t>상반기 인력 배치 지연으로 착수 이월</a:t>
+                      </a:r>
+                    </a:p>
+                  </a:txBody>
+                  <a:tcPr marL="54864" marR="54864" marT="18288" marB="18288" anchor="ctr">
+                    <a:solidFill>
+                      <a:srgbClr val="FFFFFF"/>
+                    </a:solidFill>
+                  </a:tcPr>
+                </a:tc>
+              </a:tr>
+            </a:tbl>
+          </a:graphicData>
+        </a:graphic>
+      </p:graphicFrame>
     </p:spTree>
   </p:cSld>
   <p:clrMapOvr>

--- a/my-task/report-template-ai-agent/예시_채워진샘플.pptx
+++ b/my-task/report-template-ai-agent/예시_채워진샘플.pptx
@@ -4155,7 +4155,7 @@
                           </a:solidFill>
                           <a:latin typeface="맑은 고딕"/>
                         </a:rPr>
-                        <a:t>2026 상반기 로드맵 이행 현황</a:t>
+                        <a:t>2026 상반기 로드맵 이행 실적 · 하반기 추진 계획</a:t>
                       </a:r>
                     </a:p>
                   </a:txBody>
@@ -4310,7 +4310,7 @@
         </p:nvGraphicFramePr>
         <p:xfrm>
           <a:off x="502920" y="1234440"/>
-          <a:ext cx="11185853" cy="1544954"/>
+          <a:ext cx="11185853" cy="1751647"/>
         </p:xfrm>
         <a:graphic>
           <a:graphicData uri="http://schemas.openxmlformats.org/drawingml/2006/table">
@@ -4479,7 +4479,7 @@
                           </a:solidFill>
                           <a:latin typeface="맑은 고딕"/>
                         </a:rPr>
-                        <a:t>하반기 방향</a:t>
+                        <a:t>하반기 목표 (H2 기준선)</a:t>
                       </a:r>
                     </a:p>
                   </a:txBody>
@@ -4490,7 +4490,7 @@
                   </a:tcPr>
                 </a:tc>
               </a:tr>
-              <a:tr h="282892">
+              <a:tr h="489585">
                 <a:tc>
                   <a:txBody>
                     <a:bodyPr wrap="square"/>
@@ -4642,7 +4642,7 @@
                           </a:solidFill>
                           <a:latin typeface="맑은 고딕"/>
                         </a:rPr>
-                        <a:t>전 라인 상용 이관</a:t>
+                        <a:t>Q4까지 전 라인(12개) 상용 이관</a:t>
                       </a:r>
                     </a:p>
                   </a:txBody>
@@ -4805,7 +4805,7 @@
                           </a:solidFill>
                           <a:latin typeface="맑은 고딕"/>
                         </a:rPr>
-                        <a:t>데이터 보강 후 재학습</a:t>
+                        <a:t>데이터 보강·재학습으로 정확도 80% 달성</a:t>
                       </a:r>
                     </a:p>
                   </a:txBody>
@@ -4968,7 +4968,7 @@
                           </a:solidFill>
                           <a:latin typeface="맑은 고딕"/>
                         </a:rPr>
-                        <a:t>Q3 파일럿 재개</a:t>
+                        <a:t>Q3 파일럿 완료·현업 정성 평가 확보</a:t>
                       </a:r>
                     </a:p>
                   </a:txBody>
@@ -4991,7 +4991,7 @@
         </p:nvSpPr>
         <p:spPr>
           <a:xfrm>
-            <a:off x="548640" y="2889122"/>
+            <a:off x="548640" y="3095815"/>
             <a:ext cx="11185855" cy="332359"/>
           </a:xfrm>
           <a:prstGeom prst="rect">
@@ -5032,7 +5032,7 @@
         </p:nvSpPr>
         <p:spPr>
           <a:xfrm>
-            <a:off x="548640" y="3276345"/>
+            <a:off x="548640" y="3483038"/>
             <a:ext cx="11185855" cy="344423"/>
           </a:xfrm>
           <a:prstGeom prst="rect">
